--- a/lectures/b05/ppt/b05-l15.pptx
+++ b/lectures/b05/ppt/b05-l15.pptx
@@ -13228,7 +13228,7 @@
                 <a:ea typeface="Malgun Gothic"/>
                 <a:cs typeface="Malgun Gothic"/>
               </a:rPr>
-              <a:t>(B08 L10)이 조현병 유사 정신증 → PV⁺ GABA 개재뉴런의 NMDA 저기능 → 탈억제 → 피질 피라미드 과활성·감마 진동 이상 → 하류 도파민 조절 이상. NMDA 보조작용제(글리신, D-세린, GlyT1 억제제 이클레퍼틴 — 3상 음성) 시도.</a:t>
+              <a:t>(B08 L06)이 조현병 유사 정신증 → PV⁺ GABA 개재뉴런의 NMDA 저기능 → 탈억제 → 피질 피라미드 과활성·감마 진동 이상 → 하류 도파민 조절 이상. NMDA 보조작용제(글리신, D-세린, GlyT1 억제제 이클레퍼틴 — 3상 음성) 시도.</a:t>
             </a:r>
           </a:p>
         </p:txBody>
